--- a/e2e/fixtures/morph-shape-swap.pptx
+++ b/e2e/fixtures/morph-shape-swap.pptx
@@ -402,7 +402,7 @@
       </p:grpSpPr>
       <p:sp>
         <p:nvSpPr>
-          <p:cNvPr id="3" name="Rectangle 1"/>
+          <p:cNvPr id="2" name="Rectangle 1"/>
           <p:cNvSpPr txBox="0"/>
           <p:nvPr/>
         </p:nvSpPr>
@@ -431,7 +431,7 @@
       </p:sp>
       <p:sp>
         <p:nvSpPr>
-          <p:cNvPr id="2" name="TextBox 2"/>
+          <p:cNvPr id="3" name="TextBox 2"/>
           <p:cNvSpPr txBox="1"/>
           <p:nvPr/>
         </p:nvSpPr>
@@ -484,7 +484,7 @@
       </p:grpSpPr>
       <p:sp>
         <p:nvSpPr>
-          <p:cNvPr id="3" name="Rectangle 3"/>
+          <p:cNvPr id="2" name="Rectangle 3"/>
           <p:cNvSpPr txBox="0"/>
           <p:nvPr/>
         </p:nvSpPr>
@@ -513,7 +513,7 @@
       </p:sp>
       <p:sp>
         <p:nvSpPr>
-          <p:cNvPr id="4" name="TextBox 4"/>
+          <p:cNvPr id="3" name="TextBox 4"/>
           <p:cNvSpPr txBox="1"/>
           <p:nvPr/>
         </p:nvSpPr>

--- a/e2e/fixtures/morph-shape-swap.pptx
+++ b/e2e/fixtures/morph-shape-swap.pptx
@@ -448,12 +448,10 @@
           <a:bodyPr wrap="square"/>
           <a:lstStyle/>
           <a:p>
-            <a:pPr/>
             <a:r>
-              <a:rPr lang="en-US" dirty="0" sz="2100" b="1"/>
+              <a:rPr lang="en-US" sz="2100" b="1" dirty="0"/>
               <a:t>Morph Start</a:t>
             </a:r>
-            <a:endParaRPr lang="en-US"/>
           </a:p>
         </p:txBody>
       </p:sp>
@@ -530,12 +528,10 @@
           <a:bodyPr wrap="square"/>
           <a:lstStyle/>
           <a:p>
-            <a:pPr/>
             <a:r>
-              <a:rPr lang="en-US" dirty="0" sz="2100" b="1"/>
+              <a:rPr lang="en-US" sz="2100" b="1" dirty="0"/>
               <a:t>Morph End</a:t>
             </a:r>
-            <a:endParaRPr lang="en-US"/>
           </a:p>
         </p:txBody>
       </p:sp>
